--- a/Week_1/001-SDLC/SDLC.pptx
+++ b/Week_1/001-SDLC/SDLC.pptx
@@ -370,7 +370,7 @@
             <a:fld id="{B61BEF0D-F0BB-DE4B-95CE-6DB70DBA9567}" type="datetimeFigureOut">
               <a:rPr lang="en-US" dirty="0"/>
               <a:pPr/>
-              <a:t>9/19/2025</a:t>
+              <a:t>9/21/2025</a:t>
             </a:fld>
             <a:endParaRPr lang="en-US" dirty="0"/>
           </a:p>
@@ -632,7 +632,7 @@
             <a:fld id="{B61BEF0D-F0BB-DE4B-95CE-6DB70DBA9567}" type="datetimeFigureOut">
               <a:rPr lang="en-US" dirty="0"/>
               <a:pPr/>
-              <a:t>9/19/2025</a:t>
+              <a:t>9/21/2025</a:t>
             </a:fld>
             <a:endParaRPr lang="en-US" dirty="0"/>
           </a:p>
@@ -867,7 +867,7 @@
             <a:fld id="{B61BEF0D-F0BB-DE4B-95CE-6DB70DBA9567}" type="datetimeFigureOut">
               <a:rPr lang="en-US" dirty="0"/>
               <a:pPr/>
-              <a:t>9/19/2025</a:t>
+              <a:t>9/21/2025</a:t>
             </a:fld>
             <a:endParaRPr lang="en-US" dirty="0"/>
           </a:p>
@@ -1107,7 +1107,7 @@
             <a:fld id="{B61BEF0D-F0BB-DE4B-95CE-6DB70DBA9567}" type="datetimeFigureOut">
               <a:rPr lang="en-US" dirty="0"/>
               <a:pPr/>
-              <a:t>9/19/2025</a:t>
+              <a:t>9/21/2025</a:t>
             </a:fld>
             <a:endParaRPr lang="en-US" dirty="0"/>
           </a:p>
@@ -1415,7 +1415,7 @@
             <a:fld id="{B61BEF0D-F0BB-DE4B-95CE-6DB70DBA9567}" type="datetimeFigureOut">
               <a:rPr lang="en-US" dirty="0"/>
               <a:pPr/>
-              <a:t>9/19/2025</a:t>
+              <a:t>9/21/2025</a:t>
             </a:fld>
             <a:endParaRPr lang="en-US" dirty="0"/>
           </a:p>
@@ -1716,7 +1716,7 @@
             <a:fld id="{B61BEF0D-F0BB-DE4B-95CE-6DB70DBA9567}" type="datetimeFigureOut">
               <a:rPr lang="en-US" dirty="0"/>
               <a:pPr/>
-              <a:t>9/19/2025</a:t>
+              <a:t>9/21/2025</a:t>
             </a:fld>
             <a:endParaRPr lang="en-US" dirty="0"/>
           </a:p>
@@ -2137,7 +2137,7 @@
             <a:fld id="{B61BEF0D-F0BB-DE4B-95CE-6DB70DBA9567}" type="datetimeFigureOut">
               <a:rPr lang="en-US" dirty="0"/>
               <a:pPr/>
-              <a:t>9/19/2025</a:t>
+              <a:t>9/21/2025</a:t>
             </a:fld>
             <a:endParaRPr lang="en-US" dirty="0"/>
           </a:p>
@@ -2300,7 +2300,7 @@
             <a:fld id="{B61BEF0D-F0BB-DE4B-95CE-6DB70DBA9567}" type="datetimeFigureOut">
               <a:rPr lang="en-US" dirty="0"/>
               <a:pPr/>
-              <a:t>9/19/2025</a:t>
+              <a:t>9/21/2025</a:t>
             </a:fld>
             <a:endParaRPr lang="en-US" dirty="0"/>
           </a:p>
@@ -2397,7 +2397,7 @@
             <a:fld id="{B61BEF0D-F0BB-DE4B-95CE-6DB70DBA9567}" type="datetimeFigureOut">
               <a:rPr lang="en-US" dirty="0"/>
               <a:pPr/>
-              <a:t>9/19/2025</a:t>
+              <a:t>9/21/2025</a:t>
             </a:fld>
             <a:endParaRPr lang="en-US" dirty="0"/>
           </a:p>
@@ -2775,7 +2775,7 @@
             <a:fld id="{B61BEF0D-F0BB-DE4B-95CE-6DB70DBA9567}" type="datetimeFigureOut">
               <a:rPr lang="en-US" dirty="0"/>
               <a:pPr/>
-              <a:t>9/19/2025</a:t>
+              <a:t>9/21/2025</a:t>
             </a:fld>
             <a:endParaRPr lang="en-US" dirty="0"/>
           </a:p>
@@ -3061,7 +3061,7 @@
             <a:fld id="{B61BEF0D-F0BB-DE4B-95CE-6DB70DBA9567}" type="datetimeFigureOut">
               <a:rPr lang="en-US" dirty="0"/>
               <a:pPr/>
-              <a:t>9/19/2025</a:t>
+              <a:t>9/21/2025</a:t>
             </a:fld>
             <a:endParaRPr lang="en-US" dirty="0"/>
           </a:p>
@@ -3300,7 +3300,7 @@
             <a:fld id="{B61BEF0D-F0BB-DE4B-95CE-6DB70DBA9567}" type="datetimeFigureOut">
               <a:rPr lang="en-US" dirty="0"/>
               <a:pPr/>
-              <a:t>9/19/2025</a:t>
+              <a:t>9/21/2025</a:t>
             </a:fld>
             <a:endParaRPr lang="en-US" dirty="0"/>
           </a:p>
@@ -5122,11 +5122,11 @@
           <a:lstStyle/>
           <a:p>
             <a:r>
-              <a:rPr lang="en-US" b="1" dirty="0"/>
+              <a:rPr lang="en-US" dirty="0"/>
               <a:t>Definition:  </a:t>
             </a:r>
             <a:r>
-              <a:rPr lang="en-US" b="1" dirty="0">
+              <a:rPr lang="en-US" dirty="0">
                 <a:solidFill>
                   <a:schemeClr val="accent2"/>
                 </a:solidFill>
@@ -5156,11 +5156,11 @@
           </a:p>
           <a:p>
             <a:r>
-              <a:rPr lang="en-US" b="1" dirty="0"/>
+              <a:rPr lang="en-US" dirty="0"/>
               <a:t>Definition:  </a:t>
             </a:r>
             <a:r>
-              <a:rPr lang="en-US" b="1" dirty="0">
+              <a:rPr lang="en-US" dirty="0">
                 <a:solidFill>
                   <a:schemeClr val="accent2"/>
                 </a:solidFill>
@@ -5190,11 +5190,11 @@
           </a:p>
           <a:p>
             <a:r>
-              <a:rPr lang="en-US" b="1" dirty="0"/>
+              <a:rPr lang="en-US" dirty="0"/>
               <a:t>Definition:  </a:t>
             </a:r>
             <a:r>
-              <a:rPr lang="en-US" b="1" dirty="0">
+              <a:rPr lang="en-US" dirty="0">
                 <a:solidFill>
                   <a:schemeClr val="accent2"/>
                 </a:solidFill>
@@ -5212,11 +5212,11 @@
           </a:p>
           <a:p>
             <a:r>
-              <a:rPr lang="en-US" b="1" dirty="0"/>
+              <a:rPr lang="en-US" dirty="0"/>
               <a:t>Definition:  </a:t>
             </a:r>
             <a:r>
-              <a:rPr lang="en-US" b="1" dirty="0">
+              <a:rPr lang="en-US" dirty="0">
                 <a:solidFill>
                   <a:schemeClr val="accent2"/>
                 </a:solidFill>
@@ -5224,8 +5224,12 @@
               <a:t>Velocity</a:t>
             </a:r>
             <a:r>
+              <a:rPr lang="en-US" dirty="0"/>
+              <a:t> </a:t>
+            </a:r>
+            <a:r>
               <a:rPr lang="en-US" b="1" dirty="0"/>
-              <a:t> -</a:t>
+              <a:t>-</a:t>
             </a:r>
             <a:r>
               <a:rPr lang="en-US" dirty="0"/>
